--- a/tutorial/T03/tut03.pptx
+++ b/tutorial/T03/tut03.pptx
@@ -10132,8 +10132,8 @@
           </a:p>
         </p:txBody>
       </p:sp>
-      <mc:AlternateContent xmlns:mc="http://schemas.openxmlformats.org/markup-compatibility/2006">
-        <mc:Choice xmlns:a14="http://schemas.microsoft.com/office/drawing/2010/main" Requires="a14">
+      <mc:AlternateContent xmlns:mc="http://schemas.openxmlformats.org/markup-compatibility/2006" xmlns:a14="http://schemas.microsoft.com/office/drawing/2010/main">
+        <mc:Choice Requires="a14">
           <p:sp>
             <p:nvSpPr>
               <p:cNvPr id="8" name="TextBox 7">
@@ -10304,7 +10304,7 @@
             </p:txBody>
           </p:sp>
         </mc:Choice>
-        <mc:Fallback>
+        <mc:Fallback xmlns="">
           <p:sp>
             <p:nvSpPr>
               <p:cNvPr id="8" name="TextBox 7">
@@ -10349,8 +10349,8 @@
           </p:sp>
         </mc:Fallback>
       </mc:AlternateContent>
-      <mc:AlternateContent xmlns:mc="http://schemas.openxmlformats.org/markup-compatibility/2006">
-        <mc:Choice xmlns:a14="http://schemas.microsoft.com/office/drawing/2010/main" Requires="a14">
+      <mc:AlternateContent xmlns:mc="http://schemas.openxmlformats.org/markup-compatibility/2006" xmlns:a14="http://schemas.microsoft.com/office/drawing/2010/main">
+        <mc:Choice Requires="a14">
           <p:sp>
             <p:nvSpPr>
               <p:cNvPr id="9" name="TextBox 8">
@@ -10598,7 +10598,7 @@
             </p:txBody>
           </p:sp>
         </mc:Choice>
-        <mc:Fallback>
+        <mc:Fallback xmlns="">
           <p:sp>
             <p:nvSpPr>
               <p:cNvPr id="9" name="TextBox 8">
@@ -10643,8 +10643,8 @@
           </p:sp>
         </mc:Fallback>
       </mc:AlternateContent>
-      <mc:AlternateContent xmlns:mc="http://schemas.openxmlformats.org/markup-compatibility/2006">
-        <mc:Choice xmlns:a14="http://schemas.microsoft.com/office/drawing/2010/main" Requires="a14">
+      <mc:AlternateContent xmlns:mc="http://schemas.openxmlformats.org/markup-compatibility/2006" xmlns:a14="http://schemas.microsoft.com/office/drawing/2010/main">
+        <mc:Choice Requires="a14">
           <p:sp>
             <p:nvSpPr>
               <p:cNvPr id="10" name="TextBox 9">
@@ -10826,7 +10826,7 @@
             </p:txBody>
           </p:sp>
         </mc:Choice>
-        <mc:Fallback>
+        <mc:Fallback xmlns="">
           <p:sp>
             <p:nvSpPr>
               <p:cNvPr id="10" name="TextBox 9">
@@ -12047,6 +12047,103 @@
           <a:p>
             <a:pPr algn="ctr"/>
             <a:endParaRPr lang="en-HK"/>
+          </a:p>
+        </p:txBody>
+      </p:sp>
+      <p:sp>
+        <p:nvSpPr>
+          <p:cNvPr id="23" name="矩形 22"/>
+          <p:cNvSpPr/>
+          <p:nvPr/>
+        </p:nvSpPr>
+        <p:spPr>
+          <a:xfrm>
+            <a:off x="5674316" y="6108808"/>
+            <a:ext cx="6096000" cy="646331"/>
+          </a:xfrm>
+          <a:prstGeom prst="rect">
+            <a:avLst/>
+          </a:prstGeom>
+        </p:spPr>
+        <p:txBody>
+          <a:bodyPr>
+            <a:spAutoFit/>
+          </a:bodyPr>
+          <a:lstStyle/>
+          <a:p>
+            <a:r>
+              <a:rPr lang="en-US" altLang="zh-CN" b="1" dirty="0"/>
+              <a:t>We will email </a:t>
+            </a:r>
+            <a:r>
+              <a:rPr lang="en-US" altLang="zh-CN" b="1" dirty="0" smtClean="0"/>
+              <a:t>everyone</a:t>
+            </a:r>
+            <a:r>
+              <a:rPr lang="en-US" altLang="zh-CN" b="1" dirty="0"/>
+              <a:t> your</a:t>
+            </a:r>
+            <a:r>
+              <a:rPr lang="en-US" altLang="zh-CN" b="1" dirty="0" smtClean="0"/>
+              <a:t> </a:t>
+            </a:r>
+            <a:r>
+              <a:rPr lang="en-US" altLang="zh-CN" b="1" dirty="0" err="1" smtClean="0">
+                <a:solidFill>
+                  <a:srgbClr val="C00000"/>
+                </a:solidFill>
+              </a:rPr>
+              <a:t>autograder</a:t>
+            </a:r>
+            <a:r>
+              <a:rPr lang="en-US" altLang="zh-CN" b="1" dirty="0" smtClean="0">
+                <a:solidFill>
+                  <a:srgbClr val="C00000"/>
+                </a:solidFill>
+              </a:rPr>
+              <a:t> </a:t>
+            </a:r>
+            <a:r>
+              <a:rPr lang="en-US" altLang="zh-CN" b="1" dirty="0">
+                <a:solidFill>
+                  <a:srgbClr val="C00000"/>
+                </a:solidFill>
+              </a:rPr>
+              <a:t>account and password</a:t>
+            </a:r>
+            <a:r>
+              <a:rPr lang="en-US" altLang="zh-CN" b="1" dirty="0"/>
+              <a:t> to </a:t>
+            </a:r>
+            <a:r>
+              <a:rPr lang="en-US" altLang="zh-CN" b="1" dirty="0" smtClean="0">
+                <a:solidFill>
+                  <a:srgbClr val="C00000"/>
+                </a:solidFill>
+              </a:rPr>
+              <a:t>your </a:t>
+            </a:r>
+            <a:r>
+              <a:rPr lang="en-US" altLang="zh-CN" b="1" dirty="0" err="1">
+                <a:solidFill>
+                  <a:srgbClr val="C00000"/>
+                </a:solidFill>
+              </a:rPr>
+              <a:t>CUHK</a:t>
+            </a:r>
+            <a:r>
+              <a:rPr lang="en-US" altLang="zh-CN" b="1" dirty="0">
+                <a:solidFill>
+                  <a:srgbClr val="C00000"/>
+                </a:solidFill>
+              </a:rPr>
+              <a:t> email </a:t>
+            </a:r>
+            <a:r>
+              <a:rPr lang="en-US" altLang="zh-CN" b="1" u="sng" dirty="0"/>
+              <a:t>this weekend.</a:t>
+            </a:r>
+            <a:endParaRPr lang="zh-CN" altLang="en-US" b="1" u="sng" dirty="0"/>
           </a:p>
         </p:txBody>
       </p:sp>
